--- a/Backend/services/pptx-generator-service/slides/global/dados_cliente.pptx
+++ b/Backend/services/pptx-generator-service/slides/global/dados_cliente.pptx
@@ -126,8 +126,7 @@
 <file path=ppt/revisionInfo.xml><?xml version="1.0" encoding="utf-8"?>
 <p1510:revInfo xmlns:a="http://schemas.openxmlformats.org/drawingml/2006/main" xmlns:r="http://schemas.openxmlformats.org/officeDocument/2006/relationships" xmlns:p1510="http://schemas.microsoft.com/office/powerpoint/2015/10/main">
   <p1510:revLst>
-    <p1510:client id="{69AED55A-0459-2EC7-26D8-58244682698A}" v="87" dt="2026-05-18T20:47:59.838"/>
-    <p1510:client id="{C9D069B7-4F04-5F58-5642-D4549FB126FD}" v="255" dt="2026-05-18T19:44:09.512"/>
+    <p1510:client id="{6A50BC40-0F6C-6E56-2F7C-E284124E375E}" v="37" dt="2026-05-25T17:12:14.992"/>
   </p1510:revLst>
 </p1510:revInfo>
 </file>
@@ -311,7 +310,7 @@
           <a:p>
             <a:fld id="{5BCAD085-E8A6-8845-BD4E-CB4CCA059FC4}" type="datetimeFigureOut">
               <a:rPr lang="en-US" smtClean="0"/>
-              <a:t>5/18/2026</a:t>
+              <a:t>5/25/2026</a:t>
             </a:fld>
             <a:endParaRPr lang="en-US"/>
           </a:p>
@@ -479,7 +478,7 @@
           <a:p>
             <a:fld id="{5BCAD085-E8A6-8845-BD4E-CB4CCA059FC4}" type="datetimeFigureOut">
               <a:rPr lang="en-US" smtClean="0"/>
-              <a:t>5/18/2026</a:t>
+              <a:t>5/25/2026</a:t>
             </a:fld>
             <a:endParaRPr lang="en-US"/>
           </a:p>
@@ -657,7 +656,7 @@
           <a:p>
             <a:fld id="{5BCAD085-E8A6-8845-BD4E-CB4CCA059FC4}" type="datetimeFigureOut">
               <a:rPr lang="en-US" smtClean="0"/>
-              <a:t>5/18/2026</a:t>
+              <a:t>5/25/2026</a:t>
             </a:fld>
             <a:endParaRPr lang="en-US"/>
           </a:p>
@@ -825,7 +824,7 @@
           <a:p>
             <a:fld id="{5BCAD085-E8A6-8845-BD4E-CB4CCA059FC4}" type="datetimeFigureOut">
               <a:rPr lang="en-US" smtClean="0"/>
-              <a:t>5/18/2026</a:t>
+              <a:t>5/25/2026</a:t>
             </a:fld>
             <a:endParaRPr lang="en-US"/>
           </a:p>
@@ -1070,7 +1069,7 @@
           <a:p>
             <a:fld id="{5BCAD085-E8A6-8845-BD4E-CB4CCA059FC4}" type="datetimeFigureOut">
               <a:rPr lang="en-US" smtClean="0"/>
-              <a:t>5/18/2026</a:t>
+              <a:t>5/25/2026</a:t>
             </a:fld>
             <a:endParaRPr lang="en-US"/>
           </a:p>
@@ -1355,7 +1354,7 @@
           <a:p>
             <a:fld id="{5BCAD085-E8A6-8845-BD4E-CB4CCA059FC4}" type="datetimeFigureOut">
               <a:rPr lang="en-US" smtClean="0"/>
-              <a:t>5/18/2026</a:t>
+              <a:t>5/25/2026</a:t>
             </a:fld>
             <a:endParaRPr lang="en-US"/>
           </a:p>
@@ -1774,7 +1773,7 @@
           <a:p>
             <a:fld id="{5BCAD085-E8A6-8845-BD4E-CB4CCA059FC4}" type="datetimeFigureOut">
               <a:rPr lang="en-US" smtClean="0"/>
-              <a:t>5/18/2026</a:t>
+              <a:t>5/25/2026</a:t>
             </a:fld>
             <a:endParaRPr lang="en-US"/>
           </a:p>
@@ -1891,7 +1890,7 @@
           <a:p>
             <a:fld id="{5BCAD085-E8A6-8845-BD4E-CB4CCA059FC4}" type="datetimeFigureOut">
               <a:rPr lang="en-US" smtClean="0"/>
-              <a:t>5/18/2026</a:t>
+              <a:t>5/25/2026</a:t>
             </a:fld>
             <a:endParaRPr lang="en-US"/>
           </a:p>
@@ -1986,7 +1985,7 @@
           <a:p>
             <a:fld id="{5BCAD085-E8A6-8845-BD4E-CB4CCA059FC4}" type="datetimeFigureOut">
               <a:rPr lang="en-US" smtClean="0"/>
-              <a:t>5/18/2026</a:t>
+              <a:t>5/25/2026</a:t>
             </a:fld>
             <a:endParaRPr lang="en-US"/>
           </a:p>
@@ -2261,7 +2260,7 @@
           <a:p>
             <a:fld id="{5BCAD085-E8A6-8845-BD4E-CB4CCA059FC4}" type="datetimeFigureOut">
               <a:rPr lang="en-US" smtClean="0"/>
-              <a:t>5/18/2026</a:t>
+              <a:t>5/25/2026</a:t>
             </a:fld>
             <a:endParaRPr lang="en-US"/>
           </a:p>
@@ -2513,7 +2512,7 @@
           <a:p>
             <a:fld id="{5BCAD085-E8A6-8845-BD4E-CB4CCA059FC4}" type="datetimeFigureOut">
               <a:rPr lang="en-US" smtClean="0"/>
-              <a:t>5/18/2026</a:t>
+              <a:t>5/25/2026</a:t>
             </a:fld>
             <a:endParaRPr lang="en-US"/>
           </a:p>
@@ -2724,7 +2723,7 @@
           <a:p>
             <a:fld id="{5BCAD085-E8A6-8845-BD4E-CB4CCA059FC4}" type="datetimeFigureOut">
               <a:rPr lang="en-US" smtClean="0"/>
-              <a:t>5/18/2026</a:t>
+              <a:t>5/25/2026</a:t>
             </a:fld>
             <a:endParaRPr lang="en-US"/>
           </a:p>
@@ -3813,7 +3812,7 @@
           <p:nvPr>
             <p:extLst>
               <p:ext uri="{D42A27DB-BD31-4B8C-83A1-F6EECF244321}">
-                <p14:modId xmlns:p14="http://schemas.microsoft.com/office/powerpoint/2010/main" val="3571940171"/>
+                <p14:modId xmlns:p14="http://schemas.microsoft.com/office/powerpoint/2010/main" val="2325331876"/>
               </p:ext>
             </p:extLst>
           </p:nvPr>
@@ -3856,12 +3855,12 @@
                         </a:lnSpc>
                       </a:pPr>
                       <a:r>
-                        <a:rPr lang="en-BR" sz="1600">
+                        <a:rPr lang="en-BR" sz="1600" dirty="0">
                           <a:solidFill>
                             <a:srgbClr val="FF0000"/>
                           </a:solidFill>
-                          <a:latin typeface="Poppins" pitchFamily="2" charset="77"/>
-                          <a:cs typeface="Poppins" pitchFamily="2" charset="77"/>
+                          <a:latin typeface="Poppins"/>
+                          <a:cs typeface="Poppins"/>
                         </a:rPr>
                         <a:t>Nome</a:t>
                       </a:r>
@@ -3964,12 +3963,12 @@
                         </a:lnSpc>
                       </a:pPr>
                       <a:r>
-                        <a:rPr lang="en-BR" sz="1600">
+                        <a:rPr lang="en-BR" sz="1600" dirty="0">
                           <a:solidFill>
                             <a:srgbClr val="FF0000"/>
                           </a:solidFill>
-                          <a:latin typeface="Poppins" pitchFamily="2" charset="77"/>
-                          <a:cs typeface="Poppins" pitchFamily="2" charset="77"/>
+                          <a:latin typeface="Poppins"/>
+                          <a:cs typeface="Poppins"/>
                         </a:rPr>
                         <a:t>Contato</a:t>
                       </a:r>
@@ -4123,7 +4122,7 @@
                           <a:latin typeface="Poppins"/>
                           <a:cs typeface="Poppins"/>
                         </a:rPr>
-                        <a:t>endereco_obra</a:t>
+                        <a:t>endereco_cliente</a:t>
                       </a:r>
                       <a:r>
                         <a:rPr lang="pt-BR" sz="1200" b="1" i="0" u="none" strike="noStrike" noProof="0" dirty="0">
@@ -4248,12 +4247,12 @@
                         </a:lnSpc>
                       </a:pPr>
                       <a:r>
-                        <a:rPr lang="en-BR" sz="1600" b="1">
+                        <a:rPr lang="en-BR" sz="1600" b="1" dirty="0">
                           <a:solidFill>
                             <a:srgbClr val="FF0000"/>
                           </a:solidFill>
-                          <a:latin typeface="Poppins" pitchFamily="2" charset="77"/>
-                          <a:cs typeface="Poppins" pitchFamily="2" charset="77"/>
+                          <a:latin typeface="Poppins"/>
+                          <a:cs typeface="Poppins"/>
                         </a:rPr>
                         <a:t>Telefone</a:t>
                       </a:r>
@@ -4343,7 +4342,7 @@
                         </a:lnSpc>
                       </a:pPr>
                       <a:r>
-                        <a:rPr lang="en-BR" sz="1600" b="1">
+                        <a:rPr lang="en-BR" sz="1600" b="1" dirty="0">
                           <a:solidFill>
                             <a:srgbClr val="FF0000"/>
                           </a:solidFill>
@@ -4465,19 +4464,9 @@
                           <a:latin typeface="Poppins"/>
                           <a:cs typeface="Poppins"/>
                         </a:rPr>
-                        <a:t>Local da </a:t>
+                        <a:t>Local da obra</a:t>
                       </a:r>
-                      <a:r>
-                        <a:rPr lang="en-BR" sz="1600" b="1">
-                          <a:solidFill>
-                            <a:srgbClr val="FF0000"/>
-                          </a:solidFill>
-                          <a:latin typeface="Poppins"/>
-                          <a:cs typeface="Poppins"/>
-                        </a:rPr>
-                        <a:t>obra</a:t>
-                      </a:r>
-                      <a:endParaRPr lang="pt-BR"/>
+                      <a:endParaRPr lang="pt-BR" dirty="0"/>
                     </a:p>
                     <a:p>
                       <a:pPr lvl="0" algn="ctr">

--- a/Backend/services/pptx-generator-service/slides/global/dados_cliente.pptx
+++ b/Backend/services/pptx-generator-service/slides/global/dados_cliente.pptx
@@ -126,7 +126,10 @@
 <file path=ppt/revisionInfo.xml><?xml version="1.0" encoding="utf-8"?>
 <p1510:revInfo xmlns:a="http://schemas.openxmlformats.org/drawingml/2006/main" xmlns:r="http://schemas.openxmlformats.org/officeDocument/2006/relationships" xmlns:p1510="http://schemas.microsoft.com/office/powerpoint/2015/10/main">
   <p1510:revLst>
+    <p1510:client id="{0E90006E-7EEE-9B24-6B0C-E78C402B8888}" v="3" dt="2026-05-26T18:05:00.908"/>
+    <p1510:client id="{3FEAA1C6-DCAC-FA2C-4BB8-5ED88BA5CD66}" v="45" dt="2026-05-26T16:51:54.799"/>
     <p1510:client id="{6A50BC40-0F6C-6E56-2F7C-E284124E375E}" v="37" dt="2026-05-25T17:12:14.992"/>
+    <p1510:client id="{82DFB376-BD1F-BF6A-D915-D086E54B2465}" v="10" dt="2026-05-26T18:03:04.446"/>
   </p1510:revLst>
 </p1510:revInfo>
 </file>
@@ -310,7 +313,7 @@
           <a:p>
             <a:fld id="{5BCAD085-E8A6-8845-BD4E-CB4CCA059FC4}" type="datetimeFigureOut">
               <a:rPr lang="en-US" smtClean="0"/>
-              <a:t>5/25/2026</a:t>
+              <a:t>5/26/2026</a:t>
             </a:fld>
             <a:endParaRPr lang="en-US"/>
           </a:p>
@@ -478,7 +481,7 @@
           <a:p>
             <a:fld id="{5BCAD085-E8A6-8845-BD4E-CB4CCA059FC4}" type="datetimeFigureOut">
               <a:rPr lang="en-US" smtClean="0"/>
-              <a:t>5/25/2026</a:t>
+              <a:t>5/26/2026</a:t>
             </a:fld>
             <a:endParaRPr lang="en-US"/>
           </a:p>
@@ -656,7 +659,7 @@
           <a:p>
             <a:fld id="{5BCAD085-E8A6-8845-BD4E-CB4CCA059FC4}" type="datetimeFigureOut">
               <a:rPr lang="en-US" smtClean="0"/>
-              <a:t>5/25/2026</a:t>
+              <a:t>5/26/2026</a:t>
             </a:fld>
             <a:endParaRPr lang="en-US"/>
           </a:p>
@@ -824,7 +827,7 @@
           <a:p>
             <a:fld id="{5BCAD085-E8A6-8845-BD4E-CB4CCA059FC4}" type="datetimeFigureOut">
               <a:rPr lang="en-US" smtClean="0"/>
-              <a:t>5/25/2026</a:t>
+              <a:t>5/26/2026</a:t>
             </a:fld>
             <a:endParaRPr lang="en-US"/>
           </a:p>
@@ -1069,7 +1072,7 @@
           <a:p>
             <a:fld id="{5BCAD085-E8A6-8845-BD4E-CB4CCA059FC4}" type="datetimeFigureOut">
               <a:rPr lang="en-US" smtClean="0"/>
-              <a:t>5/25/2026</a:t>
+              <a:t>5/26/2026</a:t>
             </a:fld>
             <a:endParaRPr lang="en-US"/>
           </a:p>
@@ -1354,7 +1357,7 @@
           <a:p>
             <a:fld id="{5BCAD085-E8A6-8845-BD4E-CB4CCA059FC4}" type="datetimeFigureOut">
               <a:rPr lang="en-US" smtClean="0"/>
-              <a:t>5/25/2026</a:t>
+              <a:t>5/26/2026</a:t>
             </a:fld>
             <a:endParaRPr lang="en-US"/>
           </a:p>
@@ -1773,7 +1776,7 @@
           <a:p>
             <a:fld id="{5BCAD085-E8A6-8845-BD4E-CB4CCA059FC4}" type="datetimeFigureOut">
               <a:rPr lang="en-US" smtClean="0"/>
-              <a:t>5/25/2026</a:t>
+              <a:t>5/26/2026</a:t>
             </a:fld>
             <a:endParaRPr lang="en-US"/>
           </a:p>
@@ -1890,7 +1893,7 @@
           <a:p>
             <a:fld id="{5BCAD085-E8A6-8845-BD4E-CB4CCA059FC4}" type="datetimeFigureOut">
               <a:rPr lang="en-US" smtClean="0"/>
-              <a:t>5/25/2026</a:t>
+              <a:t>5/26/2026</a:t>
             </a:fld>
             <a:endParaRPr lang="en-US"/>
           </a:p>
@@ -1985,7 +1988,7 @@
           <a:p>
             <a:fld id="{5BCAD085-E8A6-8845-BD4E-CB4CCA059FC4}" type="datetimeFigureOut">
               <a:rPr lang="en-US" smtClean="0"/>
-              <a:t>5/25/2026</a:t>
+              <a:t>5/26/2026</a:t>
             </a:fld>
             <a:endParaRPr lang="en-US"/>
           </a:p>
@@ -2260,7 +2263,7 @@
           <a:p>
             <a:fld id="{5BCAD085-E8A6-8845-BD4E-CB4CCA059FC4}" type="datetimeFigureOut">
               <a:rPr lang="en-US" smtClean="0"/>
-              <a:t>5/25/2026</a:t>
+              <a:t>5/26/2026</a:t>
             </a:fld>
             <a:endParaRPr lang="en-US"/>
           </a:p>
@@ -2512,7 +2515,7 @@
           <a:p>
             <a:fld id="{5BCAD085-E8A6-8845-BD4E-CB4CCA059FC4}" type="datetimeFigureOut">
               <a:rPr lang="en-US" smtClean="0"/>
-              <a:t>5/25/2026</a:t>
+              <a:t>5/26/2026</a:t>
             </a:fld>
             <a:endParaRPr lang="en-US"/>
           </a:p>
@@ -2723,7 +2726,7 @@
           <a:p>
             <a:fld id="{5BCAD085-E8A6-8845-BD4E-CB4CCA059FC4}" type="datetimeFigureOut">
               <a:rPr lang="en-US" smtClean="0"/>
-              <a:t>5/25/2026</a:t>
+              <a:t>5/26/2026</a:t>
             </a:fld>
             <a:endParaRPr lang="en-US"/>
           </a:p>
@@ -3247,7 +3250,7 @@
         <p:spPr>
           <a:xfrm>
             <a:off x="39778" y="4431263"/>
-            <a:ext cx="1063214" cy="688650"/>
+            <a:ext cx="1063214" cy="685059"/>
           </a:xfrm>
           <a:prstGeom prst="rect">
             <a:avLst/>
@@ -3255,7 +3258,7 @@
           <a:noFill/>
         </p:spPr>
         <p:txBody>
-          <a:bodyPr wrap="square" rtlCol="0">
+          <a:bodyPr wrap="square" lIns="91440" tIns="45720" rIns="91440" bIns="45720" rtlCol="0" anchor="t">
             <a:spAutoFit/>
           </a:bodyPr>
           <a:lstStyle/>
@@ -3287,11 +3290,38 @@
                 <a:solidFill>
                   <a:schemeClr val="bg1"/>
                 </a:solidFill>
-                <a:latin typeface="Poppins" pitchFamily="2" charset="77"/>
-                <a:cs typeface="Poppins" pitchFamily="2" charset="77"/>
+                <a:latin typeface="Poppins"/>
+                <a:cs typeface="Poppins"/>
               </a:rPr>
-              <a:t>P </a:t>
-            </a:r>
+              <a:t>{{</a:t>
+            </a:r>
+            <a:r>
+              <a:rPr lang="pt-BR" sz="1400" b="1" err="1">
+                <a:solidFill>
+                  <a:schemeClr val="bg1"/>
+                </a:solidFill>
+                <a:latin typeface="Poppins"/>
+                <a:cs typeface="Poppins"/>
+              </a:rPr>
+              <a:t>np</a:t>
+            </a:r>
+            <a:r>
+              <a:rPr lang="pt-BR" sz="1400" b="1">
+                <a:solidFill>
+                  <a:schemeClr val="bg1"/>
+                </a:solidFill>
+                <a:latin typeface="Poppins"/>
+                <a:cs typeface="Poppins"/>
+              </a:rPr>
+              <a:t>}}</a:t>
+            </a:r>
+            <a:endParaRPr lang="pt-BR" sz="1400" b="1">
+              <a:solidFill>
+                <a:schemeClr val="bg1"/>
+              </a:solidFill>
+              <a:latin typeface="Poppins" pitchFamily="2" charset="77"/>
+              <a:cs typeface="Poppins" pitchFamily="2" charset="77"/>
+            </a:endParaRPr>
           </a:p>
         </p:txBody>
       </p:sp>
@@ -3317,7 +3347,7 @@
         </p:blipFill>
         <p:spPr>
           <a:xfrm>
-            <a:off x="277394" y="322704"/>
+            <a:off x="250247" y="321754"/>
             <a:ext cx="622719" cy="600016"/>
           </a:xfrm>
           <a:prstGeom prst="rect">
@@ -3348,7 +3378,7 @@
           <a:noFill/>
         </p:spPr>
         <p:txBody>
-          <a:bodyPr wrap="square" rtlCol="0">
+          <a:bodyPr wrap="square" lIns="91440" tIns="45720" rIns="91440" bIns="45720" rtlCol="0" anchor="t">
             <a:spAutoFit/>
           </a:bodyPr>
           <a:lstStyle/>
@@ -3376,54 +3406,34 @@
               </a:lnSpc>
             </a:pPr>
             <a:r>
+              <a:rPr lang="pt-BR" sz="1400" b="1">
+                <a:solidFill>
+                  <a:schemeClr val="bg1"/>
+                </a:solidFill>
+                <a:latin typeface="Poppins"/>
+                <a:cs typeface="Poppins"/>
+              </a:rPr>
+              <a:t>{{</a:t>
+            </a:r>
+            <a:r>
               <a:rPr lang="pt-BR" sz="1400" b="1" err="1">
                 <a:solidFill>
                   <a:schemeClr val="bg1"/>
                 </a:solidFill>
-                <a:latin typeface="Poppins" pitchFamily="2" charset="77"/>
-                <a:cs typeface="Poppins" pitchFamily="2" charset="77"/>
+                <a:latin typeface="Poppins"/>
+                <a:cs typeface="Poppins"/>
               </a:rPr>
-              <a:t>xx</a:t>
+              <a:t>ds</a:t>
             </a:r>
             <a:r>
               <a:rPr lang="pt-BR" sz="1400" b="1">
                 <a:solidFill>
                   <a:schemeClr val="bg1"/>
                 </a:solidFill>
-                <a:latin typeface="Poppins" pitchFamily="2" charset="77"/>
-                <a:cs typeface="Poppins" pitchFamily="2" charset="77"/>
+                <a:latin typeface="Poppins"/>
+                <a:cs typeface="Poppins"/>
               </a:rPr>
-              <a:t>/</a:t>
-            </a:r>
-            <a:r>
-              <a:rPr lang="pt-BR" sz="1400" b="1" err="1">
-                <a:solidFill>
-                  <a:schemeClr val="bg1"/>
-                </a:solidFill>
-                <a:latin typeface="Poppins" pitchFamily="2" charset="77"/>
-                <a:cs typeface="Poppins" pitchFamily="2" charset="77"/>
-              </a:rPr>
-              <a:t>xx</a:t>
-            </a:r>
-            <a:r>
-              <a:rPr lang="pt-BR" sz="1400" b="1">
-                <a:solidFill>
-                  <a:schemeClr val="bg1"/>
-                </a:solidFill>
-                <a:latin typeface="Poppins" pitchFamily="2" charset="77"/>
-                <a:cs typeface="Poppins" pitchFamily="2" charset="77"/>
-              </a:rPr>
-              <a:t>/</a:t>
-            </a:r>
-            <a:r>
-              <a:rPr lang="pt-BR" sz="1400" b="1" err="1">
-                <a:solidFill>
-                  <a:schemeClr val="bg1"/>
-                </a:solidFill>
-                <a:latin typeface="Poppins" pitchFamily="2" charset="77"/>
-                <a:cs typeface="Poppins" pitchFamily="2" charset="77"/>
-              </a:rPr>
-              <a:t>xx</a:t>
+              <a:t>}}</a:t>
             </a:r>
             <a:endParaRPr lang="pt-BR" sz="1400" b="1">
               <a:solidFill>
@@ -3458,7 +3468,7 @@
           <a:noFill/>
         </p:spPr>
         <p:txBody>
-          <a:bodyPr wrap="square" rtlCol="0">
+          <a:bodyPr wrap="square" lIns="91440" tIns="45720" rIns="91440" bIns="45720" rtlCol="0" anchor="t">
             <a:spAutoFit/>
           </a:bodyPr>
           <a:lstStyle/>
@@ -3486,54 +3496,14 @@
               </a:lnSpc>
             </a:pPr>
             <a:r>
-              <a:rPr lang="pt-BR" sz="1400" b="1" err="1">
-                <a:solidFill>
-                  <a:schemeClr val="bg1"/>
-                </a:solidFill>
-                <a:latin typeface="Poppins" pitchFamily="2" charset="77"/>
-                <a:cs typeface="Poppins" pitchFamily="2" charset="77"/>
-              </a:rPr>
-              <a:t>xx</a:t>
-            </a:r>
-            <a:r>
               <a:rPr lang="pt-BR" sz="1400" b="1">
                 <a:solidFill>
                   <a:schemeClr val="bg1"/>
                 </a:solidFill>
-                <a:latin typeface="Poppins" pitchFamily="2" charset="77"/>
-                <a:cs typeface="Poppins" pitchFamily="2" charset="77"/>
+                <a:latin typeface="Poppins"/>
+                <a:cs typeface="Poppins"/>
               </a:rPr>
-              <a:t>/</a:t>
-            </a:r>
-            <a:r>
-              <a:rPr lang="pt-BR" sz="1400" b="1" err="1">
-                <a:solidFill>
-                  <a:schemeClr val="bg1"/>
-                </a:solidFill>
-                <a:latin typeface="Poppins" pitchFamily="2" charset="77"/>
-                <a:cs typeface="Poppins" pitchFamily="2" charset="77"/>
-              </a:rPr>
-              <a:t>xx</a:t>
-            </a:r>
-            <a:r>
-              <a:rPr lang="pt-BR" sz="1400" b="1">
-                <a:solidFill>
-                  <a:schemeClr val="bg1"/>
-                </a:solidFill>
-                <a:latin typeface="Poppins" pitchFamily="2" charset="77"/>
-                <a:cs typeface="Poppins" pitchFamily="2" charset="77"/>
-              </a:rPr>
-              <a:t>/</a:t>
-            </a:r>
-            <a:r>
-              <a:rPr lang="pt-BR" sz="1400" b="1" err="1">
-                <a:solidFill>
-                  <a:schemeClr val="bg1"/>
-                </a:solidFill>
-                <a:latin typeface="Poppins" pitchFamily="2" charset="77"/>
-                <a:cs typeface="Poppins" pitchFamily="2" charset="77"/>
-              </a:rPr>
-              <a:t>xx</a:t>
+              <a:t>{{de}}</a:t>
             </a:r>
             <a:endParaRPr lang="pt-BR" sz="1400" b="1">
               <a:solidFill>
@@ -3855,7 +3825,7 @@
                         </a:lnSpc>
                       </a:pPr>
                       <a:r>
-                        <a:rPr lang="en-BR" sz="1600" dirty="0">
+                        <a:rPr lang="en-BR" sz="1600">
                           <a:solidFill>
                             <a:srgbClr val="FF0000"/>
                           </a:solidFill>
@@ -3872,7 +3842,7 @@
                         </a:lnSpc>
                       </a:pPr>
                       <a:r>
-                        <a:rPr lang="pt-BR" sz="1200" dirty="0">
+                        <a:rPr lang="pt-BR" sz="1200">
                           <a:solidFill>
                             <a:schemeClr val="tx1"/>
                           </a:solidFill>
@@ -3882,7 +3852,7 @@
                         <a:t>{{ </a:t>
                       </a:r>
                       <a:r>
-                        <a:rPr lang="pt-BR" sz="1200" dirty="0" err="1">
+                        <a:rPr lang="pt-BR" sz="1200" err="1">
                           <a:solidFill>
                             <a:schemeClr val="tx1"/>
                           </a:solidFill>
@@ -3892,7 +3862,7 @@
                         <a:t>nome_razao_social</a:t>
                       </a:r>
                       <a:r>
-                        <a:rPr lang="pt-BR" sz="1200" dirty="0">
+                        <a:rPr lang="pt-BR" sz="1200">
                           <a:solidFill>
                             <a:schemeClr val="tx1"/>
                           </a:solidFill>
@@ -3901,7 +3871,7 @@
                         </a:rPr>
                         <a:t> }}</a:t>
                       </a:r>
-                      <a:endParaRPr lang="en-BR" sz="1100" dirty="0">
+                      <a:endParaRPr lang="en-BR" sz="1100">
                         <a:solidFill>
                           <a:schemeClr val="tx1"/>
                         </a:solidFill>
@@ -3963,7 +3933,7 @@
                         </a:lnSpc>
                       </a:pPr>
                       <a:r>
-                        <a:rPr lang="en-BR" sz="1600" dirty="0">
+                        <a:rPr lang="en-BR" sz="1600">
                           <a:solidFill>
                             <a:srgbClr val="FF0000"/>
                           </a:solidFill>
@@ -3987,7 +3957,7 @@
                         <a:buNone/>
                       </a:pPr>
                       <a:r>
-                        <a:rPr lang="pt-BR" sz="1200" b="1" i="0" u="none" strike="noStrike" kern="1200" noProof="0" dirty="0">
+                        <a:rPr lang="pt-BR" sz="1200" b="1" i="0" u="none" strike="noStrike" kern="1200" noProof="0">
                           <a:solidFill>
                             <a:schemeClr val="tx1"/>
                           </a:solidFill>
@@ -3998,7 +3968,7 @@
                         <a:t>{{ </a:t>
                       </a:r>
                       <a:r>
-                        <a:rPr lang="pt-BR" sz="1200" b="1" i="0" u="none" strike="noStrike" kern="1200" noProof="0" dirty="0" err="1">
+                        <a:rPr lang="pt-BR" sz="1200" b="1" i="0" u="none" strike="noStrike" kern="1200" noProof="0" err="1">
                           <a:solidFill>
                             <a:schemeClr val="tx1"/>
                           </a:solidFill>
@@ -4009,7 +3979,7 @@
                         <a:t>nome_contato</a:t>
                       </a:r>
                       <a:r>
-                        <a:rPr lang="pt-BR" sz="1200" b="1" i="0" u="none" strike="noStrike" kern="1200" noProof="0" dirty="0">
+                        <a:rPr lang="pt-BR" sz="1200" b="1" i="0" u="none" strike="noStrike" kern="1200" noProof="0">
                           <a:solidFill>
                             <a:schemeClr val="tx1"/>
                           </a:solidFill>
@@ -4081,7 +4051,7 @@
                         </a:lnSpc>
                       </a:pPr>
                       <a:r>
-                        <a:rPr lang="en-BR" sz="1600" b="1" dirty="0" err="1">
+                        <a:rPr lang="en-BR" sz="1600" b="1" err="1">
                           <a:solidFill>
                             <a:srgbClr val="FF0000"/>
                           </a:solidFill>
@@ -4105,7 +4075,7 @@
                         <a:buNone/>
                       </a:pPr>
                       <a:r>
-                        <a:rPr lang="pt-BR" sz="1200" b="1" i="0" u="none" strike="noStrike" noProof="0" dirty="0">
+                        <a:rPr lang="pt-BR" sz="1200" b="1" i="0" u="none" strike="noStrike" noProof="0">
                           <a:solidFill>
                             <a:schemeClr val="tx1"/>
                           </a:solidFill>
@@ -4115,7 +4085,7 @@
                         <a:t>{{ </a:t>
                       </a:r>
                       <a:r>
-                        <a:rPr lang="pt-BR" sz="1200" b="1" i="0" u="none" strike="noStrike" noProof="0" dirty="0" err="1">
+                        <a:rPr lang="pt-BR" sz="1200" b="1" i="0" u="none" strike="noStrike" noProof="0" err="1">
                           <a:solidFill>
                             <a:schemeClr val="tx1"/>
                           </a:solidFill>
@@ -4125,7 +4095,7 @@
                         <a:t>endereco_cliente</a:t>
                       </a:r>
                       <a:r>
-                        <a:rPr lang="pt-BR" sz="1200" b="1" i="0" u="none" strike="noStrike" noProof="0" dirty="0">
+                        <a:rPr lang="pt-BR" sz="1200" b="1" i="0" u="none" strike="noStrike" noProof="0">
                           <a:solidFill>
                             <a:schemeClr val="tx1"/>
                           </a:solidFill>
@@ -4134,7 +4104,7 @@
                         </a:rPr>
                         <a:t> }}</a:t>
                       </a:r>
-                      <a:endParaRPr lang="pt-BR" dirty="0"/>
+                      <a:endParaRPr lang="pt-BR"/>
                     </a:p>
                   </a:txBody>
                   <a:tcPr anchor="ctr">
@@ -4247,7 +4217,7 @@
                         </a:lnSpc>
                       </a:pPr>
                       <a:r>
-                        <a:rPr lang="en-BR" sz="1600" b="1" dirty="0">
+                        <a:rPr lang="en-BR" sz="1600" b="1">
                           <a:solidFill>
                             <a:srgbClr val="FF0000"/>
                           </a:solidFill>
@@ -4271,7 +4241,7 @@
                         <a:buNone/>
                       </a:pPr>
                       <a:r>
-                        <a:rPr lang="pt-BR" sz="1200" b="1" i="0" u="none" strike="noStrike" noProof="0" dirty="0">
+                        <a:rPr lang="pt-BR" sz="1200" b="1" i="0" u="none" strike="noStrike" noProof="0">
                           <a:solidFill>
                             <a:schemeClr val="tx1"/>
                           </a:solidFill>
@@ -4280,7 +4250,7 @@
                         </a:rPr>
                         <a:t>{{ telefone }}</a:t>
                       </a:r>
-                      <a:endParaRPr lang="pt-BR" sz="1200" b="1" i="0" u="none" strike="noStrike" noProof="0" dirty="0">
+                      <a:endParaRPr lang="pt-BR" sz="1200" b="1" i="0" u="none" strike="noStrike" noProof="0">
                         <a:solidFill>
                           <a:srgbClr val="FFFFFF"/>
                         </a:solidFill>
@@ -4342,7 +4312,7 @@
                         </a:lnSpc>
                       </a:pPr>
                       <a:r>
-                        <a:rPr lang="en-BR" sz="1600" b="1" dirty="0">
+                        <a:rPr lang="en-BR" sz="1600" b="1">
                           <a:solidFill>
                             <a:srgbClr val="FF0000"/>
                           </a:solidFill>
@@ -4366,7 +4336,7 @@
                         <a:buNone/>
                       </a:pPr>
                       <a:r>
-                        <a:rPr lang="pt-BR" sz="1200" b="1" i="0" u="none" strike="noStrike" noProof="0" dirty="0">
+                        <a:rPr lang="pt-BR" sz="1200" b="1" i="0" u="none" strike="noStrike" noProof="0">
                           <a:solidFill>
                             <a:schemeClr val="tx1"/>
                           </a:solidFill>
@@ -4376,7 +4346,7 @@
                         <a:t>{{ </a:t>
                       </a:r>
                       <a:r>
-                        <a:rPr lang="pt-BR" sz="1200" b="1" i="0" u="none" strike="noStrike" noProof="0" dirty="0" err="1">
+                        <a:rPr lang="pt-BR" sz="1200" b="1" i="0" u="none" strike="noStrike" noProof="0" err="1">
                           <a:solidFill>
                             <a:schemeClr val="tx1"/>
                           </a:solidFill>
@@ -4386,7 +4356,7 @@
                         <a:t>email</a:t>
                       </a:r>
                       <a:r>
-                        <a:rPr lang="pt-BR" sz="1200" b="1" i="0" u="none" strike="noStrike" noProof="0" dirty="0">
+                        <a:rPr lang="pt-BR" sz="1200" b="1" i="0" u="none" strike="noStrike" noProof="0">
                           <a:solidFill>
                             <a:schemeClr val="tx1"/>
                           </a:solidFill>
@@ -4457,7 +4427,7 @@
                         </a:lnSpc>
                       </a:pPr>
                       <a:r>
-                        <a:rPr lang="en-BR" sz="1600" b="1" dirty="0">
+                        <a:rPr lang="en-BR" sz="1600" b="1">
                           <a:solidFill>
                             <a:srgbClr val="FF0000"/>
                           </a:solidFill>
@@ -4466,7 +4436,7 @@
                         </a:rPr>
                         <a:t>Local da obra</a:t>
                       </a:r>
-                      <a:endParaRPr lang="pt-BR" dirty="0"/>
+                      <a:endParaRPr lang="pt-BR"/>
                     </a:p>
                     <a:p>
                       <a:pPr lvl="0" algn="ctr">
@@ -4482,7 +4452,7 @@
                         <a:buNone/>
                       </a:pPr>
                       <a:r>
-                        <a:rPr lang="pt-BR" sz="1200" b="1" i="0" u="none" strike="noStrike" noProof="0" dirty="0">
+                        <a:rPr lang="pt-BR" sz="1200" b="1" i="0" u="none" strike="noStrike" noProof="0">
                           <a:solidFill>
                             <a:schemeClr val="tx1"/>
                           </a:solidFill>
@@ -4492,7 +4462,7 @@
                         <a:t>{{ </a:t>
                       </a:r>
                       <a:r>
-                        <a:rPr lang="pt-BR" sz="1200" b="1" i="0" u="none" strike="noStrike" noProof="0" dirty="0" err="1">
+                        <a:rPr lang="pt-BR" sz="1200" b="1" i="0" u="none" strike="noStrike" noProof="0" err="1">
                           <a:solidFill>
                             <a:schemeClr val="tx1"/>
                           </a:solidFill>
@@ -4502,7 +4472,7 @@
                         <a:t>local_obra</a:t>
                       </a:r>
                       <a:r>
-                        <a:rPr lang="pt-BR" sz="1200" b="1" i="0" u="none" strike="noStrike" noProof="0" dirty="0">
+                        <a:rPr lang="pt-BR" sz="1200" b="1" i="0" u="none" strike="noStrike" noProof="0">
                           <a:solidFill>
                             <a:schemeClr val="tx1"/>
                           </a:solidFill>

--- a/Backend/services/pptx-generator-service/slides/global/dados_cliente.pptx
+++ b/Backend/services/pptx-generator-service/slides/global/dados_cliente.pptx
@@ -130,6 +130,7 @@
     <p1510:client id="{3FEAA1C6-DCAC-FA2C-4BB8-5ED88BA5CD66}" v="45" dt="2026-05-26T16:51:54.799"/>
     <p1510:client id="{6A50BC40-0F6C-6E56-2F7C-E284124E375E}" v="37" dt="2026-05-25T17:12:14.992"/>
     <p1510:client id="{82DFB376-BD1F-BF6A-D915-D086E54B2465}" v="10" dt="2026-05-26T18:03:04.446"/>
+    <p1510:client id="{DF99392A-A6C2-6C61-93C8-A2C5D8531998}" v="51" dt="2026-05-26T21:24:46.453"/>
   </p1510:revLst>
 </p1510:revInfo>
 </file>
@@ -3782,7 +3783,7 @@
           <p:nvPr>
             <p:extLst>
               <p:ext uri="{D42A27DB-BD31-4B8C-83A1-F6EECF244321}">
-                <p14:modId xmlns:p14="http://schemas.microsoft.com/office/powerpoint/2010/main" val="2325331876"/>
+                <p14:modId xmlns:p14="http://schemas.microsoft.com/office/powerpoint/2010/main" val="691965438"/>
               </p:ext>
             </p:extLst>
           </p:nvPr>
@@ -3825,14 +3826,34 @@
                         </a:lnSpc>
                       </a:pPr>
                       <a:r>
-                        <a:rPr lang="en-BR" sz="1600">
+                        <a:rPr lang="en-BR" sz="1600" dirty="0">
                           <a:solidFill>
                             <a:srgbClr val="FF0000"/>
                           </a:solidFill>
                           <a:latin typeface="Poppins"/>
                           <a:cs typeface="Poppins"/>
                         </a:rPr>
-                        <a:t>Nome</a:t>
+                        <a:t>Nome e {{</a:t>
+                      </a:r>
+                      <a:r>
+                        <a:rPr lang="en-BR" sz="1600" dirty="0" err="1">
+                          <a:solidFill>
+                            <a:srgbClr val="FF0000"/>
+                          </a:solidFill>
+                          <a:latin typeface="Poppins"/>
+                          <a:cs typeface="Poppins"/>
+                        </a:rPr>
+                        <a:t>tipo_doc</a:t>
+                      </a:r>
+                      <a:r>
+                        <a:rPr lang="en-BR" sz="1600" dirty="0">
+                          <a:solidFill>
+                            <a:srgbClr val="FF0000"/>
+                          </a:solidFill>
+                          <a:latin typeface="Poppins"/>
+                          <a:cs typeface="Poppins"/>
+                        </a:rPr>
+                        <a:t>}}</a:t>
                       </a:r>
                     </a:p>
                     <a:p>
@@ -3842,42 +3863,53 @@
                         </a:lnSpc>
                       </a:pPr>
                       <a:r>
-                        <a:rPr lang="pt-BR" sz="1200">
+                        <a:rPr lang="pt-BR" sz="1200" dirty="0">
                           <a:solidFill>
                             <a:schemeClr val="tx1"/>
                           </a:solidFill>
                           <a:latin typeface="Poppins"/>
                           <a:cs typeface="Poppins"/>
                         </a:rPr>
-                        <a:t>{{ </a:t>
+                        <a:t>{{ nome_razao_social }}</a:t>
                       </a:r>
+                    </a:p>
+                    <a:p>
+                      <a:pPr lvl="0" algn="ctr">
+                        <a:lnSpc>
+                          <a:spcPct val="150000"/>
+                        </a:lnSpc>
+                        <a:buNone/>
+                      </a:pPr>
                       <a:r>
-                        <a:rPr lang="pt-BR" sz="1200" err="1">
+                        <a:rPr lang="pt-BR" sz="1200" dirty="0">
                           <a:solidFill>
                             <a:schemeClr val="tx1"/>
                           </a:solidFill>
                           <a:latin typeface="Poppins"/>
                           <a:cs typeface="Poppins"/>
                         </a:rPr>
-                        <a:t>nome_razao_social</a:t>
+                        <a:t>{{</a:t>
                       </a:r>
                       <a:r>
-                        <a:rPr lang="pt-BR" sz="1200">
+                        <a:rPr lang="pt-BR" sz="1200" dirty="0" err="1">
                           <a:solidFill>
                             <a:schemeClr val="tx1"/>
                           </a:solidFill>
                           <a:latin typeface="Poppins"/>
                           <a:cs typeface="Poppins"/>
                         </a:rPr>
-                        <a:t> }}</a:t>
+                        <a:t>n_doc</a:t>
                       </a:r>
-                      <a:endParaRPr lang="en-BR" sz="1100">
-                        <a:solidFill>
-                          <a:schemeClr val="tx1"/>
-                        </a:solidFill>
-                        <a:latin typeface="Poppins" pitchFamily="2" charset="77"/>
-                        <a:cs typeface="Poppins" pitchFamily="2" charset="77"/>
-                      </a:endParaRPr>
+                      <a:r>
+                        <a:rPr lang="pt-BR" sz="1200" dirty="0">
+                          <a:solidFill>
+                            <a:schemeClr val="tx1"/>
+                          </a:solidFill>
+                          <a:latin typeface="Poppins"/>
+                          <a:cs typeface="Poppins"/>
+                        </a:rPr>
+                        <a:t>}}</a:t>
+                      </a:r>
                     </a:p>
                   </a:txBody>
                   <a:tcPr anchor="ctr">
@@ -3933,7 +3965,7 @@
                         </a:lnSpc>
                       </a:pPr>
                       <a:r>
-                        <a:rPr lang="en-BR" sz="1600">
+                        <a:rPr lang="en-BR" sz="1600" dirty="0">
                           <a:solidFill>
                             <a:srgbClr val="FF0000"/>
                           </a:solidFill>
@@ -3957,7 +3989,7 @@
                         <a:buNone/>
                       </a:pPr>
                       <a:r>
-                        <a:rPr lang="pt-BR" sz="1200" b="1" i="0" u="none" strike="noStrike" kern="1200" noProof="0">
+                        <a:rPr lang="pt-BR" sz="1200" b="1" i="0" u="none" strike="noStrike" kern="1200" noProof="0" dirty="0">
                           <a:solidFill>
                             <a:schemeClr val="tx1"/>
                           </a:solidFill>
@@ -3968,7 +4000,7 @@
                         <a:t>{{ </a:t>
                       </a:r>
                       <a:r>
-                        <a:rPr lang="pt-BR" sz="1200" b="1" i="0" u="none" strike="noStrike" kern="1200" noProof="0" err="1">
+                        <a:rPr lang="pt-BR" sz="1200" b="1" i="0" u="none" strike="noStrike" kern="1200" noProof="0" dirty="0" err="1">
                           <a:solidFill>
                             <a:schemeClr val="tx1"/>
                           </a:solidFill>
@@ -3979,7 +4011,7 @@
                         <a:t>nome_contato</a:t>
                       </a:r>
                       <a:r>
-                        <a:rPr lang="pt-BR" sz="1200" b="1" i="0" u="none" strike="noStrike" kern="1200" noProof="0">
+                        <a:rPr lang="pt-BR" sz="1200" b="1" i="0" u="none" strike="noStrike" kern="1200" noProof="0" dirty="0">
                           <a:solidFill>
                             <a:schemeClr val="tx1"/>
                           </a:solidFill>
@@ -4060,6 +4092,13 @@
                         </a:rPr>
                         <a:t>Endereço</a:t>
                       </a:r>
+                      <a:endParaRPr lang="en-BR" sz="1600" b="1" dirty="0" err="1">
+                        <a:solidFill>
+                          <a:srgbClr val="FF0000"/>
+                        </a:solidFill>
+                        <a:latin typeface="Poppins"/>
+                        <a:cs typeface="Poppins"/>
+                      </a:endParaRPr>
                     </a:p>
                     <a:p>
                       <a:pPr lvl="0" algn="ctr">
@@ -4075,7 +4114,7 @@
                         <a:buNone/>
                       </a:pPr>
                       <a:r>
-                        <a:rPr lang="pt-BR" sz="1200" b="1" i="0" u="none" strike="noStrike" noProof="0">
+                        <a:rPr lang="pt-BR" sz="1200" b="1" i="0" u="none" strike="noStrike" noProof="0" dirty="0">
                           <a:solidFill>
                             <a:schemeClr val="tx1"/>
                           </a:solidFill>
@@ -4085,7 +4124,7 @@
                         <a:t>{{ </a:t>
                       </a:r>
                       <a:r>
-                        <a:rPr lang="pt-BR" sz="1200" b="1" i="0" u="none" strike="noStrike" noProof="0" err="1">
+                        <a:rPr lang="pt-BR" sz="1200" b="1" i="0" u="none" strike="noStrike" noProof="0" dirty="0" err="1">
                           <a:solidFill>
                             <a:schemeClr val="tx1"/>
                           </a:solidFill>
@@ -4095,7 +4134,7 @@
                         <a:t>endereco_cliente</a:t>
                       </a:r>
                       <a:r>
-                        <a:rPr lang="pt-BR" sz="1200" b="1" i="0" u="none" strike="noStrike" noProof="0">
+                        <a:rPr lang="pt-BR" sz="1200" b="1" i="0" u="none" strike="noStrike" noProof="0" dirty="0">
                           <a:solidFill>
                             <a:schemeClr val="tx1"/>
                           </a:solidFill>
@@ -4104,7 +4143,7 @@
                         </a:rPr>
                         <a:t> }}</a:t>
                       </a:r>
-                      <a:endParaRPr lang="pt-BR"/>
+                      <a:endParaRPr lang="pt-BR" dirty="0"/>
                     </a:p>
                   </a:txBody>
                   <a:tcPr anchor="ctr">
@@ -4217,7 +4256,7 @@
                         </a:lnSpc>
                       </a:pPr>
                       <a:r>
-                        <a:rPr lang="en-BR" sz="1600" b="1">
+                        <a:rPr lang="en-BR" sz="1600" b="1" dirty="0">
                           <a:solidFill>
                             <a:srgbClr val="FF0000"/>
                           </a:solidFill>
@@ -4241,7 +4280,7 @@
                         <a:buNone/>
                       </a:pPr>
                       <a:r>
-                        <a:rPr lang="pt-BR" sz="1200" b="1" i="0" u="none" strike="noStrike" noProof="0">
+                        <a:rPr lang="pt-BR" sz="1200" b="1" i="0" u="none" strike="noStrike" noProof="0" dirty="0">
                           <a:solidFill>
                             <a:schemeClr val="tx1"/>
                           </a:solidFill>
@@ -4250,7 +4289,7 @@
                         </a:rPr>
                         <a:t>{{ telefone }}</a:t>
                       </a:r>
-                      <a:endParaRPr lang="pt-BR" sz="1200" b="1" i="0" u="none" strike="noStrike" noProof="0">
+                      <a:endParaRPr lang="pt-BR" sz="1200" b="1" i="0" u="none" strike="noStrike" noProof="0" dirty="0">
                         <a:solidFill>
                           <a:srgbClr val="FFFFFF"/>
                         </a:solidFill>
@@ -4312,7 +4351,7 @@
                         </a:lnSpc>
                       </a:pPr>
                       <a:r>
-                        <a:rPr lang="en-BR" sz="1600" b="1">
+                        <a:rPr lang="en-BR" sz="1600" b="1" dirty="0">
                           <a:solidFill>
                             <a:srgbClr val="FF0000"/>
                           </a:solidFill>
@@ -4336,7 +4375,7 @@
                         <a:buNone/>
                       </a:pPr>
                       <a:r>
-                        <a:rPr lang="pt-BR" sz="1200" b="1" i="0" u="none" strike="noStrike" noProof="0">
+                        <a:rPr lang="pt-BR" sz="1200" b="1" i="0" u="none" strike="noStrike" noProof="0" dirty="0">
                           <a:solidFill>
                             <a:schemeClr val="tx1"/>
                           </a:solidFill>
@@ -4346,7 +4385,7 @@
                         <a:t>{{ </a:t>
                       </a:r>
                       <a:r>
-                        <a:rPr lang="pt-BR" sz="1200" b="1" i="0" u="none" strike="noStrike" noProof="0" err="1">
+                        <a:rPr lang="pt-BR" sz="1200" b="1" i="0" u="none" strike="noStrike" noProof="0" dirty="0" err="1">
                           <a:solidFill>
                             <a:schemeClr val="tx1"/>
                           </a:solidFill>
@@ -4356,7 +4395,7 @@
                         <a:t>email</a:t>
                       </a:r>
                       <a:r>
-                        <a:rPr lang="pt-BR" sz="1200" b="1" i="0" u="none" strike="noStrike" noProof="0">
+                        <a:rPr lang="pt-BR" sz="1200" b="1" i="0" u="none" strike="noStrike" noProof="0" dirty="0">
                           <a:solidFill>
                             <a:schemeClr val="tx1"/>
                           </a:solidFill>
@@ -4427,7 +4466,7 @@
                         </a:lnSpc>
                       </a:pPr>
                       <a:r>
-                        <a:rPr lang="en-BR" sz="1600" b="1">
+                        <a:rPr lang="en-BR" sz="1600" b="1" dirty="0">
                           <a:solidFill>
                             <a:srgbClr val="FF0000"/>
                           </a:solidFill>
@@ -4436,7 +4475,7 @@
                         </a:rPr>
                         <a:t>Local da obra</a:t>
                       </a:r>
-                      <a:endParaRPr lang="pt-BR"/>
+                      <a:endParaRPr lang="pt-BR" dirty="0"/>
                     </a:p>
                     <a:p>
                       <a:pPr lvl="0" algn="ctr">
@@ -4452,7 +4491,7 @@
                         <a:buNone/>
                       </a:pPr>
                       <a:r>
-                        <a:rPr lang="pt-BR" sz="1200" b="1" i="0" u="none" strike="noStrike" noProof="0">
+                        <a:rPr lang="pt-BR" sz="1200" b="1" i="0" u="none" strike="noStrike" noProof="0" dirty="0">
                           <a:solidFill>
                             <a:schemeClr val="tx1"/>
                           </a:solidFill>
@@ -4462,7 +4501,7 @@
                         <a:t>{{ </a:t>
                       </a:r>
                       <a:r>
-                        <a:rPr lang="pt-BR" sz="1200" b="1" i="0" u="none" strike="noStrike" noProof="0" err="1">
+                        <a:rPr lang="pt-BR" sz="1200" b="1" i="0" u="none" strike="noStrike" noProof="0" dirty="0" err="1">
                           <a:solidFill>
                             <a:schemeClr val="tx1"/>
                           </a:solidFill>
@@ -4472,7 +4511,7 @@
                         <a:t>local_obra</a:t>
                       </a:r>
                       <a:r>
-                        <a:rPr lang="pt-BR" sz="1200" b="1" i="0" u="none" strike="noStrike" noProof="0">
+                        <a:rPr lang="pt-BR" sz="1200" b="1" i="0" u="none" strike="noStrike" noProof="0" dirty="0">
                           <a:solidFill>
                             <a:schemeClr val="tx1"/>
                           </a:solidFill>
@@ -4481,7 +4520,7 @@
                         </a:rPr>
                         <a:t> }}</a:t>
                       </a:r>
-                      <a:endParaRPr lang="pt-BR" sz="1200" b="1" i="0" u="none" strike="noStrike" noProof="0">
+                      <a:endParaRPr lang="pt-BR" sz="1200" b="1" i="0" u="none" strike="noStrike" noProof="0" dirty="0">
                         <a:solidFill>
                           <a:srgbClr val="FFFFFF"/>
                         </a:solidFill>

--- a/Backend/services/pptx-generator-service/slides/global/dados_cliente.pptx
+++ b/Backend/services/pptx-generator-service/slides/global/dados_cliente.pptx
@@ -4460,6 +4460,37 @@
                     <a:bodyPr/>
                     <a:lstStyle/>
                     <a:p>
+                      <a:pPr lvl="0" algn="ctr">
+                        <a:lnSpc>
+                          <a:spcPct val="150000"/>
+                        </a:lnSpc>
+                        <a:spcBef>
+                          <a:spcPts val="0"/>
+                        </a:spcBef>
+                        <a:spcAft>
+                          <a:spcPts val="0"/>
+                        </a:spcAft>
+                        <a:buNone/>
+                      </a:pPr>
+                      <a:r>
+                        <a:rPr lang="pt-BR" sz="1200" b="1" i="0" u="none" strike="noStrike" noProof="0" dirty="0">
+                          <a:solidFill>
+                            <a:schemeClr val="tx1"/>
+                          </a:solidFill>
+                          <a:latin typeface="Poppins"/>
+                          <a:cs typeface="Poppins"/>
+                        </a:rPr>
+                        <a:t>{{ nome_da_obra }}</a:t>
+                      </a:r>
+                      <a:endParaRPr lang="pt-BR" sz="1200" b="1" i="0" u="none" strike="noStrike" noProof="0" dirty="0">
+                        <a:solidFill>
+                          <a:srgbClr val="FFFFFF"/>
+                        </a:solidFill>
+                        <a:latin typeface="Poppins"/>
+                        <a:cs typeface="Poppins"/>
+                      </a:endParaRPr>
+                    </a:p>
+                    <a:p>
                       <a:pPr algn="ctr">
                         <a:lnSpc>
                           <a:spcPct val="150000"/>

--- a/Backend/services/pptx-generator-service/slides/global/dados_cliente.pptx
+++ b/Backend/services/pptx-generator-service/slides/global/dados_cliente.pptx
@@ -126,11 +126,7 @@
 <file path=ppt/revisionInfo.xml><?xml version="1.0" encoding="utf-8"?>
 <p1510:revInfo xmlns:a="http://schemas.openxmlformats.org/drawingml/2006/main" xmlns:r="http://schemas.openxmlformats.org/officeDocument/2006/relationships" xmlns:p1510="http://schemas.microsoft.com/office/powerpoint/2015/10/main">
   <p1510:revLst>
-    <p1510:client id="{0E90006E-7EEE-9B24-6B0C-E78C402B8888}" v="3" dt="2026-05-26T18:05:00.908"/>
-    <p1510:client id="{3FEAA1C6-DCAC-FA2C-4BB8-5ED88BA5CD66}" v="45" dt="2026-05-26T16:51:54.799"/>
-    <p1510:client id="{6A50BC40-0F6C-6E56-2F7C-E284124E375E}" v="37" dt="2026-05-25T17:12:14.992"/>
-    <p1510:client id="{82DFB376-BD1F-BF6A-D915-D086E54B2465}" v="10" dt="2026-05-26T18:03:04.446"/>
-    <p1510:client id="{DF99392A-A6C2-6C61-93C8-A2C5D8531998}" v="51" dt="2026-05-26T21:24:46.453"/>
+    <p1510:client id="{8A7FEC30-4FB7-A68D-C2FD-03055B948EAE}" v="26" dt="2026-05-29T13:13:15.634"/>
   </p1510:revLst>
 </p1510:revInfo>
 </file>
@@ -314,7 +310,7 @@
           <a:p>
             <a:fld id="{5BCAD085-E8A6-8845-BD4E-CB4CCA059FC4}" type="datetimeFigureOut">
               <a:rPr lang="en-US" smtClean="0"/>
-              <a:t>5/26/2026</a:t>
+              <a:t>5/29/2026</a:t>
             </a:fld>
             <a:endParaRPr lang="en-US"/>
           </a:p>
@@ -482,7 +478,7 @@
           <a:p>
             <a:fld id="{5BCAD085-E8A6-8845-BD4E-CB4CCA059FC4}" type="datetimeFigureOut">
               <a:rPr lang="en-US" smtClean="0"/>
-              <a:t>5/26/2026</a:t>
+              <a:t>5/29/2026</a:t>
             </a:fld>
             <a:endParaRPr lang="en-US"/>
           </a:p>
@@ -660,7 +656,7 @@
           <a:p>
             <a:fld id="{5BCAD085-E8A6-8845-BD4E-CB4CCA059FC4}" type="datetimeFigureOut">
               <a:rPr lang="en-US" smtClean="0"/>
-              <a:t>5/26/2026</a:t>
+              <a:t>5/29/2026</a:t>
             </a:fld>
             <a:endParaRPr lang="en-US"/>
           </a:p>
@@ -828,7 +824,7 @@
           <a:p>
             <a:fld id="{5BCAD085-E8A6-8845-BD4E-CB4CCA059FC4}" type="datetimeFigureOut">
               <a:rPr lang="en-US" smtClean="0"/>
-              <a:t>5/26/2026</a:t>
+              <a:t>5/29/2026</a:t>
             </a:fld>
             <a:endParaRPr lang="en-US"/>
           </a:p>
@@ -1073,7 +1069,7 @@
           <a:p>
             <a:fld id="{5BCAD085-E8A6-8845-BD4E-CB4CCA059FC4}" type="datetimeFigureOut">
               <a:rPr lang="en-US" smtClean="0"/>
-              <a:t>5/26/2026</a:t>
+              <a:t>5/29/2026</a:t>
             </a:fld>
             <a:endParaRPr lang="en-US"/>
           </a:p>
@@ -1358,7 +1354,7 @@
           <a:p>
             <a:fld id="{5BCAD085-E8A6-8845-BD4E-CB4CCA059FC4}" type="datetimeFigureOut">
               <a:rPr lang="en-US" smtClean="0"/>
-              <a:t>5/26/2026</a:t>
+              <a:t>5/29/2026</a:t>
             </a:fld>
             <a:endParaRPr lang="en-US"/>
           </a:p>
@@ -1777,7 +1773,7 @@
           <a:p>
             <a:fld id="{5BCAD085-E8A6-8845-BD4E-CB4CCA059FC4}" type="datetimeFigureOut">
               <a:rPr lang="en-US" smtClean="0"/>
-              <a:t>5/26/2026</a:t>
+              <a:t>5/29/2026</a:t>
             </a:fld>
             <a:endParaRPr lang="en-US"/>
           </a:p>
@@ -1894,7 +1890,7 @@
           <a:p>
             <a:fld id="{5BCAD085-E8A6-8845-BD4E-CB4CCA059FC4}" type="datetimeFigureOut">
               <a:rPr lang="en-US" smtClean="0"/>
-              <a:t>5/26/2026</a:t>
+              <a:t>5/29/2026</a:t>
             </a:fld>
             <a:endParaRPr lang="en-US"/>
           </a:p>
@@ -1989,7 +1985,7 @@
           <a:p>
             <a:fld id="{5BCAD085-E8A6-8845-BD4E-CB4CCA059FC4}" type="datetimeFigureOut">
               <a:rPr lang="en-US" smtClean="0"/>
-              <a:t>5/26/2026</a:t>
+              <a:t>5/29/2026</a:t>
             </a:fld>
             <a:endParaRPr lang="en-US"/>
           </a:p>
@@ -2264,7 +2260,7 @@
           <a:p>
             <a:fld id="{5BCAD085-E8A6-8845-BD4E-CB4CCA059FC4}" type="datetimeFigureOut">
               <a:rPr lang="en-US" smtClean="0"/>
-              <a:t>5/26/2026</a:t>
+              <a:t>5/29/2026</a:t>
             </a:fld>
             <a:endParaRPr lang="en-US"/>
           </a:p>
@@ -2516,7 +2512,7 @@
           <a:p>
             <a:fld id="{5BCAD085-E8A6-8845-BD4E-CB4CCA059FC4}" type="datetimeFigureOut">
               <a:rPr lang="en-US" smtClean="0"/>
-              <a:t>5/26/2026</a:t>
+              <a:t>5/29/2026</a:t>
             </a:fld>
             <a:endParaRPr lang="en-US"/>
           </a:p>
@@ -2727,7 +2723,7 @@
           <a:p>
             <a:fld id="{5BCAD085-E8A6-8845-BD4E-CB4CCA059FC4}" type="datetimeFigureOut">
               <a:rPr lang="en-US" smtClean="0"/>
-              <a:t>5/26/2026</a:t>
+              <a:t>5/29/2026</a:t>
             </a:fld>
             <a:endParaRPr lang="en-US"/>
           </a:p>
@@ -3783,14 +3779,14 @@
           <p:nvPr>
             <p:extLst>
               <p:ext uri="{D42A27DB-BD31-4B8C-83A1-F6EECF244321}">
-                <p14:modId xmlns:p14="http://schemas.microsoft.com/office/powerpoint/2010/main" val="691965438"/>
+                <p14:modId xmlns:p14="http://schemas.microsoft.com/office/powerpoint/2010/main" val="1491691492"/>
               </p:ext>
             </p:extLst>
           </p:nvPr>
         </p:nvGraphicFramePr>
         <p:xfrm>
           <a:off x="2469627" y="1721928"/>
-          <a:ext cx="8704972" cy="4124900"/>
+          <a:ext cx="8704972" cy="4355335"/>
         </p:xfrm>
         <a:graphic>
           <a:graphicData uri="http://schemas.openxmlformats.org/drawingml/2006/table">
@@ -3814,7 +3810,7 @@
                   </a:extLst>
                 </a:gridCol>
               </a:tblGrid>
-              <a:tr h="1031225">
+              <a:tr h="1050351">
                 <a:tc>
                   <a:txBody>
                     <a:bodyPr/>
@@ -4071,7 +4067,7 @@
                   </a:ext>
                 </a:extLst>
               </a:tr>
-              <a:tr h="1031225">
+              <a:tr h="1050351">
                 <a:tc gridSpan="2">
                   <a:txBody>
                     <a:bodyPr/>
@@ -4083,7 +4079,7 @@
                         </a:lnSpc>
                       </a:pPr>
                       <a:r>
-                        <a:rPr lang="en-BR" sz="1600" b="1" err="1">
+                        <a:rPr lang="en-BR" sz="1600" b="1" dirty="0">
                           <a:solidFill>
                             <a:srgbClr val="FF0000"/>
                           </a:solidFill>
@@ -4092,13 +4088,6 @@
                         </a:rPr>
                         <a:t>Endereço</a:t>
                       </a:r>
-                      <a:endParaRPr lang="en-BR" sz="1600" b="1" dirty="0" err="1">
-                        <a:solidFill>
-                          <a:srgbClr val="FF0000"/>
-                        </a:solidFill>
-                        <a:latin typeface="Poppins"/>
-                        <a:cs typeface="Poppins"/>
-                      </a:endParaRPr>
                     </a:p>
                     <a:p>
                       <a:pPr lvl="0" algn="ctr">
@@ -4244,7 +4233,7 @@
                   </a:ext>
                 </a:extLst>
               </a:tr>
-              <a:tr h="1031225">
+              <a:tr h="1050351">
                 <a:tc>
                   <a:txBody>
                     <a:bodyPr/>
@@ -4454,42 +4443,11 @@
                   </a:ext>
                 </a:extLst>
               </a:tr>
-              <a:tr h="1031225">
+              <a:tr h="1204282">
                 <a:tc gridSpan="2">
                   <a:txBody>
                     <a:bodyPr/>
                     <a:lstStyle/>
-                    <a:p>
-                      <a:pPr lvl="0" algn="ctr">
-                        <a:lnSpc>
-                          <a:spcPct val="150000"/>
-                        </a:lnSpc>
-                        <a:spcBef>
-                          <a:spcPts val="0"/>
-                        </a:spcBef>
-                        <a:spcAft>
-                          <a:spcPts val="0"/>
-                        </a:spcAft>
-                        <a:buNone/>
-                      </a:pPr>
-                      <a:r>
-                        <a:rPr lang="pt-BR" sz="1200" b="1" i="0" u="none" strike="noStrike" noProof="0" dirty="0">
-                          <a:solidFill>
-                            <a:schemeClr val="tx1"/>
-                          </a:solidFill>
-                          <a:latin typeface="Poppins"/>
-                          <a:cs typeface="Poppins"/>
-                        </a:rPr>
-                        <a:t>{{ nome_da_obra }}</a:t>
-                      </a:r>
-                      <a:endParaRPr lang="pt-BR" sz="1200" b="1" i="0" u="none" strike="noStrike" noProof="0" dirty="0">
-                        <a:solidFill>
-                          <a:srgbClr val="FFFFFF"/>
-                        </a:solidFill>
-                        <a:latin typeface="Poppins"/>
-                        <a:cs typeface="Poppins"/>
-                      </a:endParaRPr>
-                    </a:p>
                     <a:p>
                       <a:pPr algn="ctr">
                         <a:lnSpc>
@@ -4511,7 +4469,58 @@
                     <a:p>
                       <a:pPr lvl="0" algn="ctr">
                         <a:lnSpc>
-                          <a:spcPct val="150000"/>
+                          <a:spcPct val="200000"/>
+                        </a:lnSpc>
+                        <a:spcBef>
+                          <a:spcPts val="0"/>
+                        </a:spcBef>
+                        <a:spcAft>
+                          <a:spcPts val="0"/>
+                        </a:spcAft>
+                        <a:buNone/>
+                      </a:pPr>
+                      <a:r>
+                        <a:rPr lang="pt-BR" sz="1200" b="1" i="0" u="none" strike="noStrike" noProof="0" dirty="0">
+                          <a:solidFill>
+                            <a:schemeClr val="tx1"/>
+                          </a:solidFill>
+                          <a:latin typeface="Poppins"/>
+                          <a:cs typeface="Poppins"/>
+                        </a:rPr>
+                        <a:t>{{ </a:t>
+                      </a:r>
+                      <a:r>
+                        <a:rPr lang="pt-BR" sz="1200" b="1" i="0" u="none" strike="noStrike" noProof="0" dirty="0" err="1">
+                          <a:solidFill>
+                            <a:schemeClr val="tx1"/>
+                          </a:solidFill>
+                          <a:latin typeface="Poppins"/>
+                          <a:cs typeface="Poppins"/>
+                        </a:rPr>
+                        <a:t>nome_da_obra</a:t>
+                      </a:r>
+                      <a:r>
+                        <a:rPr lang="pt-BR" sz="1200" b="1" i="0" u="none" strike="noStrike" noProof="0" dirty="0">
+                          <a:solidFill>
+                            <a:schemeClr val="tx1"/>
+                          </a:solidFill>
+                          <a:latin typeface="Poppins"/>
+                          <a:cs typeface="Poppins"/>
+                        </a:rPr>
+                        <a:t> }}</a:t>
+                      </a:r>
+                      <a:endParaRPr lang="pt-BR" sz="1200" b="0" i="0" u="none" strike="noStrike" noProof="0" dirty="0">
+                        <a:solidFill>
+                          <a:srgbClr val="000000"/>
+                        </a:solidFill>
+                        <a:latin typeface="Poppins"/>
+                        <a:cs typeface="Poppins"/>
+                      </a:endParaRPr>
+                    </a:p>
+                    <a:p>
+                      <a:pPr lvl="0" algn="ctr">
+                        <a:lnSpc>
+                          <a:spcPct val="200000"/>
                         </a:lnSpc>
                         <a:spcBef>
                           <a:spcPts val="0"/>
@@ -4551,13 +4560,6 @@
                         </a:rPr>
                         <a:t> }}</a:t>
                       </a:r>
-                      <a:endParaRPr lang="pt-BR" sz="1200" b="1" i="0" u="none" strike="noStrike" noProof="0" dirty="0">
-                        <a:solidFill>
-                          <a:srgbClr val="FFFFFF"/>
-                        </a:solidFill>
-                        <a:latin typeface="Poppins"/>
-                        <a:cs typeface="Poppins"/>
-                      </a:endParaRPr>
                     </a:p>
                   </a:txBody>
                   <a:tcPr anchor="ctr">
